--- a/docs/defense/finaudit_graph_defense_presentation.pptx
+++ b/docs/defense/finaudit_graph_defense_presentation.pptx
@@ -2110,7 +2110,7 @@
                 <a:ea typeface="微软雅黑" panose="020B0503020204020204" pitchFamily="34" charset="-122"/>
                 <a:cs typeface="微软雅黑" panose="020B0503020204020204" pitchFamily="34" charset="-120"/>
               </a:rPr>
-              <a:t>审计报告</a:t>
+              <a:t>Neo4j图谱</a:t>
             </a:r>
             <a:endParaRPr lang="en-US" sz="860" dirty="0"/>
           </a:p>
@@ -2603,7 +2603,7 @@
                 <a:ea typeface="微软雅黑" panose="020B0503020204020204" pitchFamily="34" charset="-122"/>
                 <a:cs typeface="微软雅黑" panose="020B0503020204020204" pitchFamily="34" charset="-120"/>
               </a:rPr>
-              <a:t>应用架构</a:t>
+              <a:t>应用+图谱</a:t>
             </a:r>
             <a:endParaRPr lang="en-US" sz="880" dirty="0"/>
           </a:p>
@@ -2643,7 +2643,7 @@
                 <a:ea typeface="微软雅黑" panose="020B0503020204020204" pitchFamily="34" charset="-122"/>
                 <a:cs typeface="微软雅黑" panose="020B0503020204020204" pitchFamily="34" charset="-120"/>
               </a:rPr>
-              <a:t>API/前端/智能/输出</a:t>
+              <a:t>API/前端/智能/Neo4j</a:t>
             </a:r>
             <a:endParaRPr lang="en-US" sz="720" dirty="0"/>
           </a:p>
@@ -3485,7 +3485,7 @@
                 <a:ea typeface="微软雅黑" panose="020B0503020204020204" pitchFamily="34" charset="-122"/>
                 <a:cs typeface="微软雅黑" panose="020B0503020204020204" pitchFamily="34" charset="-120"/>
               </a:rPr>
-              <a:t>查看风险识别、报告输出和自动化通知状态</a:t>
+              <a:t>查看风险识别、Neo4j 图谱状态、报告输出和自动化通知状态</a:t>
             </a:r>
             <a:endParaRPr lang="en-US" sz="1070" dirty="0"/>
           </a:p>
@@ -3960,7 +3960,7 @@
                 <a:ea typeface="微软雅黑" panose="020B0503020204020204" pitchFamily="34" charset="-122"/>
                 <a:cs typeface="微软雅黑" panose="020B0503020204020204" pitchFamily="34" charset="-120"/>
               </a:rPr>
-              <a:t>LoRA 定位 / Neo4j fallback / N8N 凭证 / 数据真实性</a:t>
+              <a:t>LoRA 定位 / Neo4j 写入与 fallback / N8N 凭证 / 数据真实性</a:t>
             </a:r>
             <a:endParaRPr lang="en-US" sz="740" dirty="0"/>
           </a:p>
@@ -5021,7 +5021,7 @@
                 <a:ea typeface="微软雅黑" panose="020B0503020204020204" pitchFamily="34" charset="-122"/>
                 <a:cs typeface="微软雅黑" panose="020B0503020204020204" pitchFamily="34" charset="-120"/>
               </a:rPr>
-              <a:t>技术点能对应评分表：LangGraph/RAG/Agent/N8N/LoRA</a:t>
+              <a:t>技术点能对应评分表：LangGraph/RAG/Neo4j/Agent/N8N/LoRA</a:t>
             </a:r>
             <a:endParaRPr lang="en-US" sz="980" dirty="0"/>
           </a:p>
@@ -5168,7 +5168,7 @@
                 <a:ea typeface="微软雅黑" panose="020B0503020204020204" pitchFamily="34" charset="-122"/>
                 <a:cs typeface="微软雅黑" panose="020B0503020204020204" pitchFamily="34" charset="-120"/>
               </a:rPr>
-              <a:t>数据标注 → 训练 → 应用 → 自动化</a:t>
+              <a:t>数据标注 → 训练 → 应用 → Neo4j → 自动化</a:t>
             </a:r>
             <a:endParaRPr lang="en-US" sz="720" dirty="0"/>
           </a:p>
@@ -5844,7 +5844,7 @@
                 <a:ea typeface="微软雅黑" panose="020B0503020204020204" pitchFamily="34" charset="-122"/>
                 <a:cs typeface="微软雅黑" panose="020B0503020204020204" pitchFamily="34" charset="-120"/>
               </a:rPr>
-              <a:t>证据链覆盖数据标注、模型微调、应用开发和 N8N 自动化。</a:t>
+              <a:t>证据链覆盖数据标注、模型微调、应用开发、Neo4j 图谱和 N8N 自动化。</a:t>
             </a:r>
             <a:endParaRPr lang="en-US" sz="2400" dirty="0"/>
           </a:p>
@@ -6501,7 +6501,7 @@
                 <a:ea typeface="微软雅黑" panose="020B0503020204020204" pitchFamily="34" charset="-122"/>
                 <a:cs typeface="微软雅黑" panose="020B0503020204020204" pitchFamily="34" charset="-120"/>
               </a:rPr>
-              <a:t>RAG/图谱/协商分析</a:t>
+              <a:t>RAG/Neo4j/协商分析</a:t>
             </a:r>
             <a:endParaRPr lang="en-US" sz="830" dirty="0"/>
           </a:p>
@@ -6996,7 +6996,7 @@
                 <a:ea typeface="微软雅黑" panose="020B0503020204020204" pitchFamily="34" charset="-122"/>
                 <a:cs typeface="微软雅黑" panose="020B0503020204020204" pitchFamily="34" charset="-120"/>
               </a:rPr>
-              <a:t>答辩表达：本项目不是只展示应用界面，而是从数据生产、模型实验、审计应用到自动化复核通知都有可追溯文件和可运行功能。</a:t>
+              <a:t>答辩表达：本项目不是只展示应用界面，而是从数据生产、模型实验、审计应用、Neo4j 图谱到自动化复核通知都有可追溯文件和可运行功能。</a:t>
             </a:r>
             <a:endParaRPr lang="en-US" sz="1050" dirty="0"/>
           </a:p>
@@ -7643,7 +7643,7 @@
                 <a:ea typeface="微软雅黑" panose="020B0503020204020204" pitchFamily="34" charset="-122"/>
                 <a:cs typeface="微软雅黑" panose="020B0503020204020204" pitchFamily="34" charset="-120"/>
               </a:rPr>
-              <a:t>安全检查、解析、RAG/图谱、多智能体协商</a:t>
+              <a:t>安全检查、解析、RAG/Neo4j、多智能体协商</a:t>
             </a:r>
             <a:endParaRPr lang="en-US" sz="880" dirty="0"/>
           </a:p>
@@ -7750,7 +7750,7 @@
                 <a:ea typeface="微软雅黑" panose="020B0503020204020204" pitchFamily="34" charset="-122"/>
                 <a:cs typeface="微软雅黑" panose="020B0503020204020204" pitchFamily="34" charset="-120"/>
               </a:rPr>
-              <a:t>Excel/JSON/Chroma/Neo4j fallback</a:t>
+              <a:t>Excel/JSON/Chroma/Neo4j 图数据库</a:t>
             </a:r>
             <a:endParaRPr lang="en-US" sz="880" dirty="0"/>
           </a:p>
@@ -7976,7 +7976,7 @@
                 <a:ea typeface="微软雅黑" panose="020B0503020204020204" pitchFamily="34" charset="-122"/>
                 <a:cs typeface="微软雅黑" panose="020B0503020204020204" pitchFamily="34" charset="-120"/>
               </a:rPr>
-              <a:t>图谱: 关联方线索</a:t>
+              <a:t>Neo4j: 写入+穿透</a:t>
             </a:r>
             <a:endParaRPr lang="en-US" sz="720" dirty="0"/>
           </a:p>
@@ -10444,7 +10444,7 @@
                 <a:ea typeface="微软雅黑" panose="020B0503020204020204" pitchFamily="34" charset="-122"/>
                 <a:cs typeface="微软雅黑" panose="020B0503020204020204" pitchFamily="34" charset="-120"/>
               </a:rPr>
-              <a:t>规则 + RAG + 图谱</a:t>
+              <a:t>规则 + RAG + Neo4j</a:t>
             </a:r>
             <a:endParaRPr lang="en-US" sz="900" dirty="0"/>
           </a:p>
@@ -12480,7 +12480,7 @@
                 <a:ea typeface="微软雅黑" panose="020B0503020204020204" pitchFamily="34" charset="-122"/>
                 <a:cs typeface="微软雅黑" panose="020B0503020204020204" pitchFamily="34" charset="-120"/>
               </a:rPr>
-              <a:t>RAG + 图谱</a:t>
+              <a:t>RAG + Neo4j</a:t>
             </a:r>
             <a:endParaRPr lang="en-US" sz="1150" dirty="0"/>
           </a:p>
@@ -12520,7 +12520,7 @@
                 <a:ea typeface="微软雅黑" panose="020B0503020204020204" pitchFamily="34" charset="-122"/>
                 <a:cs typeface="微软雅黑" panose="020B0503020204020204" pitchFamily="34" charset="-120"/>
               </a:rPr>
-              <a:t>用审计准则检索和关联方线索补强模型判断，降低纯 LLM 幻觉风险。</a:t>
+              <a:t>用审计准则检索和 Neo4j 关系穿透补强模型判断，降低纯 LLM 幻觉风险。</a:t>
             </a:r>
             <a:endParaRPr lang="en-US" sz="870" dirty="0"/>
           </a:p>
@@ -13008,7 +13008,7 @@
                 <a:ea typeface="微软雅黑" panose="020B0503020204020204" pitchFamily="34" charset="-122"/>
                 <a:cs typeface="微软雅黑" panose="020B0503020204020204" pitchFamily="34" charset="-120"/>
               </a:rPr>
-              <a:t>真实业务化数据</a:t>
+              <a:t>Neo4j 图谱落地</a:t>
             </a:r>
             <a:endParaRPr lang="en-US" sz="1150" dirty="0"/>
           </a:p>
@@ -13048,7 +13048,7 @@
                 <a:ea typeface="微软雅黑" panose="020B0503020204020204" pitchFamily="34" charset="-122"/>
                 <a:cs typeface="微软雅黑" panose="020B0503020204020204" pitchFamily="34" charset="-120"/>
               </a:rPr>
-              <a:t>从小 Excel 测试升级为更接近财务场景的数据集。</a:t>
+              <a:t>材料解析后写入 Neo4j，失败时回退 JSON，保证演示稳定。</a:t>
             </a:r>
             <a:endParaRPr lang="en-US" sz="870" dirty="0"/>
           </a:p>
@@ -13283,7 +13283,7 @@
                 <a:ea typeface="微软雅黑" panose="020B0503020204020204" pitchFamily="34" charset="-122"/>
                 <a:cs typeface="微软雅黑" panose="020B0503020204020204" pitchFamily="34" charset="-120"/>
               </a:rPr>
-              <a:t>个人贡献覆盖数据、模型、应用、自动化和测试五个环节。</a:t>
+              <a:t>个人贡献覆盖数据、模型、应用、图谱、自动化和测试环节。</a:t>
             </a:r>
             <a:endParaRPr lang="en-US" sz="2400" dirty="0"/>
           </a:p>
@@ -13832,7 +13832,7 @@
                 <a:ea typeface="微软雅黑" panose="020B0503020204020204" pitchFamily="34" charset="-122"/>
                 <a:cs typeface="微软雅黑" panose="020B0503020204020204" pitchFamily="34" charset="-120"/>
               </a:rPr>
-              <a:t>实现 Streamlit/FastAPI/LangGraph 审计链路与报告输出。</a:t>
+              <a:t>实现 Streamlit/FastAPI/LangGraph 审计链路、Neo4j 图谱与报告输出。</a:t>
             </a:r>
             <a:endParaRPr lang="en-US" sz="950" dirty="0"/>
           </a:p>
@@ -13872,7 +13872,7 @@
                 <a:ea typeface="微软雅黑" panose="020B0503020204020204" pitchFamily="34" charset="-122"/>
                 <a:cs typeface="微软雅黑" panose="020B0503020204020204" pitchFamily="34" charset="-120"/>
               </a:rPr>
-              <a:t>从原型走向可演示系统</a:t>
+              <a:t>形成可演示的审计图谱应用</a:t>
             </a:r>
             <a:endParaRPr lang="en-US" sz="950" dirty="0"/>
           </a:p>
@@ -14015,7 +14015,7 @@
                 <a:ea typeface="微软雅黑" panose="020B0503020204020204" pitchFamily="34" charset="-122"/>
                 <a:cs typeface="微软雅黑" panose="020B0503020204020204" pitchFamily="34" charset="-120"/>
               </a:rPr>
-              <a:t>理解业务闭环比单点模型更重要</a:t>
+              <a:t>理解图谱证据和业务闭环同样重要</a:t>
             </a:r>
             <a:endParaRPr lang="en-US" sz="950" dirty="0"/>
           </a:p>
